--- a/docs/downloads/AAU_Research_Tracker.pptx
+++ b/docs/downloads/AAU_Research_Tracker.pptx
@@ -3180,7 +3180,7 @@
                   <a:srgbClr val="D5E8DC"/>
                 </a:solidFill>
               </a:rPr>
-              <a:t>1,338 papers · 558 authors · 184 on the faculty roster</a:t>
+              <a:t>1,377 papers · 558 authors · 184 on the faculty roster</a:t>
             </a:r>
           </a:p>
           <a:p>
@@ -3190,7 +3190,7 @@
                   <a:srgbClr val="B9D9C6"/>
                 </a:solidFill>
               </a:rPr>
-              <a:t>Nothing is counted unless the paper itself prints an AAU address. Generated 2026-09-07.</a:t>
+              <a:t>Nothing is counted unless the paper itself prints an AAU address. Generated 2026-09-14.</a:t>
             </a:r>
           </a:p>
         </p:txBody>

--- a/docs/downloads/AAU_Research_Tracker.pptx
+++ b/docs/downloads/AAU_Research_Tracker.pptx
@@ -3190,7 +3190,7 @@
                   <a:srgbClr val="B9D9C6"/>
                 </a:solidFill>
               </a:rPr>
-              <a:t>Nothing is counted unless the paper itself prints an AAU address. Generated 2026-09-14.</a:t>
+              <a:t>Nothing is counted unless the paper itself prints an AAU address. Generated 2026-09-21.</a:t>
             </a:r>
           </a:p>
         </p:txBody>

--- a/docs/downloads/AAU_Research_Tracker.pptx
+++ b/docs/downloads/AAU_Research_Tracker.pptx
@@ -3180,7 +3180,7 @@
                   <a:srgbClr val="D5E8DC"/>
                 </a:solidFill>
               </a:rPr>
-              <a:t>1,377 papers · 558 authors · 184 on the faculty roster</a:t>
+              <a:t>1,390 papers · 558 authors · 184 on the faculty roster</a:t>
             </a:r>
           </a:p>
           <a:p>
@@ -3190,7 +3190,7 @@
                   <a:srgbClr val="B9D9C6"/>
                 </a:solidFill>
               </a:rPr>
-              <a:t>Nothing is counted unless the paper itself prints an AAU address. Generated 2026-09-21.</a:t>
+              <a:t>Nothing is counted unless the paper itself prints an AAU address. Generated 2026-09-28.</a:t>
             </a:r>
           </a:p>
         </p:txBody>

--- a/docs/downloads/AAU_Research_Tracker.pptx
+++ b/docs/downloads/AAU_Research_Tracker.pptx
@@ -3190,7 +3190,7 @@
                   <a:srgbClr val="B9D9C6"/>
                 </a:solidFill>
               </a:rPr>
-              <a:t>Nothing is counted unless the paper itself prints an AAU address. Generated 2026-09-28.</a:t>
+              <a:t>Nothing is counted unless the paper itself prints an AAU address. Generated 2026-10-05.</a:t>
             </a:r>
           </a:p>
         </p:txBody>

--- a/docs/downloads/AAU_Research_Tracker.pptx
+++ b/docs/downloads/AAU_Research_Tracker.pptx
@@ -3190,7 +3190,7 @@
                   <a:srgbClr val="B9D9C6"/>
                 </a:solidFill>
               </a:rPr>
-              <a:t>Nothing is counted unless the paper itself prints an AAU address. Generated 2026-10-05.</a:t>
+              <a:t>Nothing is counted unless the paper itself prints an AAU address. Generated 2026-10-12.</a:t>
             </a:r>
           </a:p>
         </p:txBody>

--- a/docs/downloads/AAU_Research_Tracker.pptx
+++ b/docs/downloads/AAU_Research_Tracker.pptx
@@ -3190,7 +3190,7 @@
                   <a:srgbClr val="B9D9C6"/>
                 </a:solidFill>
               </a:rPr>
-              <a:t>Nothing is counted unless the paper itself prints an AAU address. Generated 2026-10-12.</a:t>
+              <a:t>Nothing is counted unless the paper itself prints an AAU address. Generated 2026-10-19.</a:t>
             </a:r>
           </a:p>
         </p:txBody>
